--- a/Presentation.pptx
+++ b/Presentation.pptx
@@ -114,6 +114,9 @@
   <p:extLst>
     <p:ext uri="{EFAFB233-063F-42B5-8137-9DF3F51BA10A}">
       <p15:sldGuideLst xmlns:p15="http://schemas.microsoft.com/office/powerpoint/2012/main"/>
+    </p:ext>
+    <p:ext uri="{2D200454-40CA-4A62-9FC3-DE9A4176ACB9}">
+      <p15:notesGuideLst xmlns:p15="http://schemas.microsoft.com/office/powerpoint/2012/main"/>
     </p:ext>
   </p:extLst>
 </p:presentation>
@@ -1645,23 +1648,7 @@
                   <a:srgbClr val="FFFFFF"/>
                 </a:solidFill>
               </a:rPr>
-              <a:t> </a:t>
-            </a:r>
-            <a:r>
-              <a:rPr lang="en-US" sz="4400" b="1" dirty="0" err="1">
-                <a:solidFill>
-                  <a:srgbClr val="FFFFFF"/>
-                </a:solidFill>
-              </a:rPr>
-              <a:t>Consuting</a:t>
-            </a:r>
-            <a:r>
-              <a:rPr lang="en-US" sz="4400" b="1" dirty="0">
-                <a:solidFill>
-                  <a:srgbClr val="FFFFFF"/>
-                </a:solidFill>
-              </a:rPr>
-              <a:t> AG</a:t>
+              <a:t> Consulting AG</a:t>
             </a:r>
             <a:endParaRPr lang="en-US" sz="4400" dirty="0"/>
           </a:p>
@@ -1695,20 +1682,12 @@
               <a:buNone/>
             </a:pPr>
             <a:r>
-              <a:rPr lang="en-US" sz="3000" b="1" dirty="0" err="1">
-                <a:solidFill>
-                  <a:srgbClr val="FFFFFF"/>
-                </a:solidFill>
-              </a:rPr>
-              <a:t>Recruitmen</a:t>
-            </a:r>
-            <a:r>
               <a:rPr lang="en-US" sz="3000" b="1" dirty="0">
                 <a:solidFill>
                   <a:srgbClr val="FFFFFF"/>
                 </a:solidFill>
               </a:rPr>
-              <a:t> Process Automation</a:t>
+              <a:t>Recruitment Process Automation</a:t>
             </a:r>
             <a:endParaRPr lang="en-US" sz="3000" dirty="0"/>
           </a:p>
